--- a/宣道詩/(宣道詩108)頌讚主名.pptx
+++ b/宣道詩/(宣道詩108)頌讚主名.pptx
@@ -118,7 +118,7 @@
   </p:defaultTextStyle>
   <p:extLst>
     <p:ext uri="{EFAFB233-063F-42B5-8137-9DF3F51BA10A}">
-      <p15:sldGuideLst xmlns:p15="http://schemas.microsoft.com/office/powerpoint/2012/main" xmlns="">
+      <p15:sldGuideLst xmlns:p15="http://schemas.microsoft.com/office/powerpoint/2012/main">
         <p15:guide id="1" orient="horz" pos="2160" userDrawn="1">
           <p15:clr>
             <a:srgbClr val="A4A3A4"/>
@@ -173,10 +173,9 @@
           <a:lstStyle/>
           <a:p>
             <a:r>
-              <a:rPr lang="zh-TW" altLang="en-US" smtClean="0"/>
+              <a:rPr lang="zh-TW" altLang="en-US"/>
               <a:t>按一下以編輯母片標題樣式</a:t>
             </a:r>
-            <a:endParaRPr lang="zh-TW" altLang="en-US"/>
           </a:p>
         </p:txBody>
       </p:sp>
@@ -292,10 +291,9 @@
           </a:lstStyle>
           <a:p>
             <a:r>
-              <a:rPr lang="zh-TW" altLang="en-US" smtClean="0"/>
+              <a:rPr lang="zh-TW" altLang="en-US"/>
               <a:t>按一下以編輯母片副標題樣式</a:t>
             </a:r>
-            <a:endParaRPr lang="zh-TW" altLang="en-US"/>
           </a:p>
         </p:txBody>
       </p:sp>
@@ -317,7 +315,7 @@
             <a:fld id="{C6AA4BA2-E9B8-4EFE-9EAE-9EAA4387E320}" type="datetimeFigureOut">
               <a:rPr lang="zh-TW" altLang="en-US" smtClean="0"/>
               <a:pPr/>
-              <a:t>2022/11/22</a:t>
+              <a:t>2024/11/9</a:t>
             </a:fld>
             <a:endParaRPr lang="zh-TW" altLang="en-US"/>
           </a:p>
@@ -407,10 +405,9 @@
           <a:lstStyle/>
           <a:p>
             <a:r>
-              <a:rPr lang="zh-TW" altLang="en-US" smtClean="0"/>
+              <a:rPr lang="zh-TW" altLang="en-US"/>
               <a:t>按一下以編輯母片標題樣式</a:t>
             </a:r>
-            <a:endParaRPr lang="zh-TW" altLang="en-US"/>
           </a:p>
         </p:txBody>
       </p:sp>
@@ -431,38 +428,37 @@
           <a:p>
             <a:pPr lvl="0"/>
             <a:r>
-              <a:rPr lang="zh-TW" altLang="en-US" smtClean="0"/>
+              <a:rPr lang="zh-TW" altLang="en-US"/>
               <a:t>按一下以編輯母片文字樣式</a:t>
             </a:r>
           </a:p>
           <a:p>
             <a:pPr lvl="1"/>
             <a:r>
-              <a:rPr lang="zh-TW" altLang="en-US" smtClean="0"/>
+              <a:rPr lang="zh-TW" altLang="en-US"/>
               <a:t>第二層</a:t>
             </a:r>
           </a:p>
           <a:p>
             <a:pPr lvl="2"/>
             <a:r>
-              <a:rPr lang="zh-TW" altLang="en-US" smtClean="0"/>
+              <a:rPr lang="zh-TW" altLang="en-US"/>
               <a:t>第三層</a:t>
             </a:r>
           </a:p>
           <a:p>
             <a:pPr lvl="3"/>
             <a:r>
-              <a:rPr lang="zh-TW" altLang="en-US" smtClean="0"/>
+              <a:rPr lang="zh-TW" altLang="en-US"/>
               <a:t>第四層</a:t>
             </a:r>
           </a:p>
           <a:p>
             <a:pPr lvl="4"/>
             <a:r>
-              <a:rPr lang="zh-TW" altLang="en-US" smtClean="0"/>
+              <a:rPr lang="zh-TW" altLang="en-US"/>
               <a:t>第五層</a:t>
             </a:r>
-            <a:endParaRPr lang="zh-TW" altLang="en-US"/>
           </a:p>
         </p:txBody>
       </p:sp>
@@ -484,7 +480,7 @@
             <a:fld id="{C6AA4BA2-E9B8-4EFE-9EAE-9EAA4387E320}" type="datetimeFigureOut">
               <a:rPr lang="zh-TW" altLang="en-US" smtClean="0"/>
               <a:pPr/>
-              <a:t>2022/11/22</a:t>
+              <a:t>2024/11/9</a:t>
             </a:fld>
             <a:endParaRPr lang="zh-TW" altLang="en-US"/>
           </a:p>
@@ -579,10 +575,9 @@
           <a:lstStyle/>
           <a:p>
             <a:r>
-              <a:rPr lang="zh-TW" altLang="en-US" smtClean="0"/>
+              <a:rPr lang="zh-TW" altLang="en-US"/>
               <a:t>按一下以編輯母片標題樣式</a:t>
             </a:r>
-            <a:endParaRPr lang="zh-TW" altLang="en-US"/>
           </a:p>
         </p:txBody>
       </p:sp>
@@ -608,38 +603,37 @@
           <a:p>
             <a:pPr lvl="0"/>
             <a:r>
-              <a:rPr lang="zh-TW" altLang="en-US" smtClean="0"/>
+              <a:rPr lang="zh-TW" altLang="en-US"/>
               <a:t>按一下以編輯母片文字樣式</a:t>
             </a:r>
           </a:p>
           <a:p>
             <a:pPr lvl="1"/>
             <a:r>
-              <a:rPr lang="zh-TW" altLang="en-US" smtClean="0"/>
+              <a:rPr lang="zh-TW" altLang="en-US"/>
               <a:t>第二層</a:t>
             </a:r>
           </a:p>
           <a:p>
             <a:pPr lvl="2"/>
             <a:r>
-              <a:rPr lang="zh-TW" altLang="en-US" smtClean="0"/>
+              <a:rPr lang="zh-TW" altLang="en-US"/>
               <a:t>第三層</a:t>
             </a:r>
           </a:p>
           <a:p>
             <a:pPr lvl="3"/>
             <a:r>
-              <a:rPr lang="zh-TW" altLang="en-US" smtClean="0"/>
+              <a:rPr lang="zh-TW" altLang="en-US"/>
               <a:t>第四層</a:t>
             </a:r>
           </a:p>
           <a:p>
             <a:pPr lvl="4"/>
             <a:r>
-              <a:rPr lang="zh-TW" altLang="en-US" smtClean="0"/>
+              <a:rPr lang="zh-TW" altLang="en-US"/>
               <a:t>第五層</a:t>
             </a:r>
-            <a:endParaRPr lang="zh-TW" altLang="en-US"/>
           </a:p>
         </p:txBody>
       </p:sp>
@@ -661,7 +655,7 @@
             <a:fld id="{C6AA4BA2-E9B8-4EFE-9EAE-9EAA4387E320}" type="datetimeFigureOut">
               <a:rPr lang="zh-TW" altLang="en-US" smtClean="0"/>
               <a:pPr/>
-              <a:t>2022/11/22</a:t>
+              <a:t>2024/11/9</a:t>
             </a:fld>
             <a:endParaRPr lang="zh-TW" altLang="en-US"/>
           </a:p>
@@ -751,10 +745,9 @@
           <a:lstStyle/>
           <a:p>
             <a:r>
-              <a:rPr lang="zh-TW" altLang="en-US" smtClean="0"/>
+              <a:rPr lang="zh-TW" altLang="en-US"/>
               <a:t>按一下以編輯母片標題樣式</a:t>
             </a:r>
-            <a:endParaRPr lang="zh-TW" altLang="en-US"/>
           </a:p>
         </p:txBody>
       </p:sp>
@@ -775,38 +768,37 @@
           <a:p>
             <a:pPr lvl="0"/>
             <a:r>
-              <a:rPr lang="zh-TW" altLang="en-US" smtClean="0"/>
+              <a:rPr lang="zh-TW" altLang="en-US"/>
               <a:t>按一下以編輯母片文字樣式</a:t>
             </a:r>
           </a:p>
           <a:p>
             <a:pPr lvl="1"/>
             <a:r>
-              <a:rPr lang="zh-TW" altLang="en-US" smtClean="0"/>
+              <a:rPr lang="zh-TW" altLang="en-US"/>
               <a:t>第二層</a:t>
             </a:r>
           </a:p>
           <a:p>
             <a:pPr lvl="2"/>
             <a:r>
-              <a:rPr lang="zh-TW" altLang="en-US" smtClean="0"/>
+              <a:rPr lang="zh-TW" altLang="en-US"/>
               <a:t>第三層</a:t>
             </a:r>
           </a:p>
           <a:p>
             <a:pPr lvl="3"/>
             <a:r>
-              <a:rPr lang="zh-TW" altLang="en-US" smtClean="0"/>
+              <a:rPr lang="zh-TW" altLang="en-US"/>
               <a:t>第四層</a:t>
             </a:r>
           </a:p>
           <a:p>
             <a:pPr lvl="4"/>
             <a:r>
-              <a:rPr lang="zh-TW" altLang="en-US" smtClean="0"/>
+              <a:rPr lang="zh-TW" altLang="en-US"/>
               <a:t>第五層</a:t>
             </a:r>
-            <a:endParaRPr lang="zh-TW" altLang="en-US"/>
           </a:p>
         </p:txBody>
       </p:sp>
@@ -828,7 +820,7 @@
             <a:fld id="{C6AA4BA2-E9B8-4EFE-9EAE-9EAA4387E320}" type="datetimeFigureOut">
               <a:rPr lang="zh-TW" altLang="en-US" smtClean="0"/>
               <a:pPr/>
-              <a:t>2022/11/22</a:t>
+              <a:t>2024/11/9</a:t>
             </a:fld>
             <a:endParaRPr lang="zh-TW" altLang="en-US"/>
           </a:p>
@@ -927,10 +919,9 @@
           </a:lstStyle>
           <a:p>
             <a:r>
-              <a:rPr lang="zh-TW" altLang="en-US" smtClean="0"/>
+              <a:rPr lang="zh-TW" altLang="en-US"/>
               <a:t>按一下以編輯母片標題樣式</a:t>
             </a:r>
-            <a:endParaRPr lang="zh-TW" altLang="en-US"/>
           </a:p>
         </p:txBody>
       </p:sp>
@@ -1047,7 +1038,7 @@
           <a:p>
             <a:pPr lvl="0"/>
             <a:r>
-              <a:rPr lang="zh-TW" altLang="en-US" smtClean="0"/>
+              <a:rPr lang="zh-TW" altLang="en-US"/>
               <a:t>按一下以編輯母片文字樣式</a:t>
             </a:r>
           </a:p>
@@ -1071,7 +1062,7 @@
             <a:fld id="{C6AA4BA2-E9B8-4EFE-9EAE-9EAA4387E320}" type="datetimeFigureOut">
               <a:rPr lang="zh-TW" altLang="en-US" smtClean="0"/>
               <a:pPr/>
-              <a:t>2022/11/22</a:t>
+              <a:t>2024/11/9</a:t>
             </a:fld>
             <a:endParaRPr lang="zh-TW" altLang="en-US"/>
           </a:p>
@@ -1161,10 +1152,9 @@
           <a:lstStyle/>
           <a:p>
             <a:r>
-              <a:rPr lang="zh-TW" altLang="en-US" smtClean="0"/>
+              <a:rPr lang="zh-TW" altLang="en-US"/>
               <a:t>按一下以編輯母片標題樣式</a:t>
             </a:r>
-            <a:endParaRPr lang="zh-TW" altLang="en-US"/>
           </a:p>
         </p:txBody>
       </p:sp>
@@ -1218,38 +1208,37 @@
           <a:p>
             <a:pPr lvl="0"/>
             <a:r>
-              <a:rPr lang="zh-TW" altLang="en-US" smtClean="0"/>
+              <a:rPr lang="zh-TW" altLang="en-US"/>
               <a:t>按一下以編輯母片文字樣式</a:t>
             </a:r>
           </a:p>
           <a:p>
             <a:pPr lvl="1"/>
             <a:r>
-              <a:rPr lang="zh-TW" altLang="en-US" smtClean="0"/>
+              <a:rPr lang="zh-TW" altLang="en-US"/>
               <a:t>第二層</a:t>
             </a:r>
           </a:p>
           <a:p>
             <a:pPr lvl="2"/>
             <a:r>
-              <a:rPr lang="zh-TW" altLang="en-US" smtClean="0"/>
+              <a:rPr lang="zh-TW" altLang="en-US"/>
               <a:t>第三層</a:t>
             </a:r>
           </a:p>
           <a:p>
             <a:pPr lvl="3"/>
             <a:r>
-              <a:rPr lang="zh-TW" altLang="en-US" smtClean="0"/>
+              <a:rPr lang="zh-TW" altLang="en-US"/>
               <a:t>第四層</a:t>
             </a:r>
           </a:p>
           <a:p>
             <a:pPr lvl="4"/>
             <a:r>
-              <a:rPr lang="zh-TW" altLang="en-US" smtClean="0"/>
+              <a:rPr lang="zh-TW" altLang="en-US"/>
               <a:t>第五層</a:t>
             </a:r>
-            <a:endParaRPr lang="zh-TW" altLang="en-US"/>
           </a:p>
         </p:txBody>
       </p:sp>
@@ -1303,38 +1292,37 @@
           <a:p>
             <a:pPr lvl="0"/>
             <a:r>
-              <a:rPr lang="zh-TW" altLang="en-US" smtClean="0"/>
+              <a:rPr lang="zh-TW" altLang="en-US"/>
               <a:t>按一下以編輯母片文字樣式</a:t>
             </a:r>
           </a:p>
           <a:p>
             <a:pPr lvl="1"/>
             <a:r>
-              <a:rPr lang="zh-TW" altLang="en-US" smtClean="0"/>
+              <a:rPr lang="zh-TW" altLang="en-US"/>
               <a:t>第二層</a:t>
             </a:r>
           </a:p>
           <a:p>
             <a:pPr lvl="2"/>
             <a:r>
-              <a:rPr lang="zh-TW" altLang="en-US" smtClean="0"/>
+              <a:rPr lang="zh-TW" altLang="en-US"/>
               <a:t>第三層</a:t>
             </a:r>
           </a:p>
           <a:p>
             <a:pPr lvl="3"/>
             <a:r>
-              <a:rPr lang="zh-TW" altLang="en-US" smtClean="0"/>
+              <a:rPr lang="zh-TW" altLang="en-US"/>
               <a:t>第四層</a:t>
             </a:r>
           </a:p>
           <a:p>
             <a:pPr lvl="4"/>
             <a:r>
-              <a:rPr lang="zh-TW" altLang="en-US" smtClean="0"/>
+              <a:rPr lang="zh-TW" altLang="en-US"/>
               <a:t>第五層</a:t>
             </a:r>
-            <a:endParaRPr lang="zh-TW" altLang="en-US"/>
           </a:p>
         </p:txBody>
       </p:sp>
@@ -1356,7 +1344,7 @@
             <a:fld id="{C6AA4BA2-E9B8-4EFE-9EAE-9EAA4387E320}" type="datetimeFigureOut">
               <a:rPr lang="zh-TW" altLang="en-US" smtClean="0"/>
               <a:pPr/>
-              <a:t>2022/11/22</a:t>
+              <a:t>2024/11/9</a:t>
             </a:fld>
             <a:endParaRPr lang="zh-TW" altLang="en-US"/>
           </a:p>
@@ -1450,10 +1438,9 @@
           </a:lstStyle>
           <a:p>
             <a:r>
-              <a:rPr lang="zh-TW" altLang="en-US" smtClean="0"/>
+              <a:rPr lang="zh-TW" altLang="en-US"/>
               <a:t>按一下以編輯母片標題樣式</a:t>
             </a:r>
-            <a:endParaRPr lang="zh-TW" altLang="en-US"/>
           </a:p>
         </p:txBody>
       </p:sp>
@@ -1516,7 +1503,7 @@
           <a:p>
             <a:pPr lvl="0"/>
             <a:r>
-              <a:rPr lang="zh-TW" altLang="en-US" smtClean="0"/>
+              <a:rPr lang="zh-TW" altLang="en-US"/>
               <a:t>按一下以編輯母片文字樣式</a:t>
             </a:r>
           </a:p>
@@ -1572,38 +1559,37 @@
           <a:p>
             <a:pPr lvl="0"/>
             <a:r>
-              <a:rPr lang="zh-TW" altLang="en-US" smtClean="0"/>
+              <a:rPr lang="zh-TW" altLang="en-US"/>
               <a:t>按一下以編輯母片文字樣式</a:t>
             </a:r>
           </a:p>
           <a:p>
             <a:pPr lvl="1"/>
             <a:r>
-              <a:rPr lang="zh-TW" altLang="en-US" smtClean="0"/>
+              <a:rPr lang="zh-TW" altLang="en-US"/>
               <a:t>第二層</a:t>
             </a:r>
           </a:p>
           <a:p>
             <a:pPr lvl="2"/>
             <a:r>
-              <a:rPr lang="zh-TW" altLang="en-US" smtClean="0"/>
+              <a:rPr lang="zh-TW" altLang="en-US"/>
               <a:t>第三層</a:t>
             </a:r>
           </a:p>
           <a:p>
             <a:pPr lvl="3"/>
             <a:r>
-              <a:rPr lang="zh-TW" altLang="en-US" smtClean="0"/>
+              <a:rPr lang="zh-TW" altLang="en-US"/>
               <a:t>第四層</a:t>
             </a:r>
           </a:p>
           <a:p>
             <a:pPr lvl="4"/>
             <a:r>
-              <a:rPr lang="zh-TW" altLang="en-US" smtClean="0"/>
+              <a:rPr lang="zh-TW" altLang="en-US"/>
               <a:t>第五層</a:t>
             </a:r>
-            <a:endParaRPr lang="zh-TW" altLang="en-US"/>
           </a:p>
         </p:txBody>
       </p:sp>
@@ -1666,7 +1652,7 @@
           <a:p>
             <a:pPr lvl="0"/>
             <a:r>
-              <a:rPr lang="zh-TW" altLang="en-US" smtClean="0"/>
+              <a:rPr lang="zh-TW" altLang="en-US"/>
               <a:t>按一下以編輯母片文字樣式</a:t>
             </a:r>
           </a:p>
@@ -1722,38 +1708,37 @@
           <a:p>
             <a:pPr lvl="0"/>
             <a:r>
-              <a:rPr lang="zh-TW" altLang="en-US" smtClean="0"/>
+              <a:rPr lang="zh-TW" altLang="en-US"/>
               <a:t>按一下以編輯母片文字樣式</a:t>
             </a:r>
           </a:p>
           <a:p>
             <a:pPr lvl="1"/>
             <a:r>
-              <a:rPr lang="zh-TW" altLang="en-US" smtClean="0"/>
+              <a:rPr lang="zh-TW" altLang="en-US"/>
               <a:t>第二層</a:t>
             </a:r>
           </a:p>
           <a:p>
             <a:pPr lvl="2"/>
             <a:r>
-              <a:rPr lang="zh-TW" altLang="en-US" smtClean="0"/>
+              <a:rPr lang="zh-TW" altLang="en-US"/>
               <a:t>第三層</a:t>
             </a:r>
           </a:p>
           <a:p>
             <a:pPr lvl="3"/>
             <a:r>
-              <a:rPr lang="zh-TW" altLang="en-US" smtClean="0"/>
+              <a:rPr lang="zh-TW" altLang="en-US"/>
               <a:t>第四層</a:t>
             </a:r>
           </a:p>
           <a:p>
             <a:pPr lvl="4"/>
             <a:r>
-              <a:rPr lang="zh-TW" altLang="en-US" smtClean="0"/>
+              <a:rPr lang="zh-TW" altLang="en-US"/>
               <a:t>第五層</a:t>
             </a:r>
-            <a:endParaRPr lang="zh-TW" altLang="en-US"/>
           </a:p>
         </p:txBody>
       </p:sp>
@@ -1775,7 +1760,7 @@
             <a:fld id="{C6AA4BA2-E9B8-4EFE-9EAE-9EAA4387E320}" type="datetimeFigureOut">
               <a:rPr lang="zh-TW" altLang="en-US" smtClean="0"/>
               <a:pPr/>
-              <a:t>2022/11/22</a:t>
+              <a:t>2024/11/9</a:t>
             </a:fld>
             <a:endParaRPr lang="zh-TW" altLang="en-US"/>
           </a:p>
@@ -1865,10 +1850,9 @@
           <a:lstStyle/>
           <a:p>
             <a:r>
-              <a:rPr lang="zh-TW" altLang="en-US" smtClean="0"/>
+              <a:rPr lang="zh-TW" altLang="en-US"/>
               <a:t>按一下以編輯母片標題樣式</a:t>
             </a:r>
-            <a:endParaRPr lang="zh-TW" altLang="en-US"/>
           </a:p>
         </p:txBody>
       </p:sp>
@@ -1890,7 +1874,7 @@
             <a:fld id="{C6AA4BA2-E9B8-4EFE-9EAE-9EAA4387E320}" type="datetimeFigureOut">
               <a:rPr lang="zh-TW" altLang="en-US" smtClean="0"/>
               <a:pPr/>
-              <a:t>2022/11/22</a:t>
+              <a:t>2024/11/9</a:t>
             </a:fld>
             <a:endParaRPr lang="zh-TW" altLang="en-US"/>
           </a:p>
@@ -1982,7 +1966,7 @@
             <a:fld id="{C6AA4BA2-E9B8-4EFE-9EAE-9EAA4387E320}" type="datetimeFigureOut">
               <a:rPr lang="zh-TW" altLang="en-US" smtClean="0"/>
               <a:pPr/>
-              <a:t>2022/11/22</a:t>
+              <a:t>2024/11/9</a:t>
             </a:fld>
             <a:endParaRPr lang="zh-TW" altLang="en-US"/>
           </a:p>
@@ -2081,10 +2065,9 @@
           </a:lstStyle>
           <a:p>
             <a:r>
-              <a:rPr lang="zh-TW" altLang="en-US" smtClean="0"/>
+              <a:rPr lang="zh-TW" altLang="en-US"/>
               <a:t>按一下以編輯母片標題樣式</a:t>
             </a:r>
-            <a:endParaRPr lang="zh-TW" altLang="en-US"/>
           </a:p>
         </p:txBody>
       </p:sp>
@@ -2138,38 +2121,37 @@
           <a:p>
             <a:pPr lvl="0"/>
             <a:r>
-              <a:rPr lang="zh-TW" altLang="en-US" smtClean="0"/>
+              <a:rPr lang="zh-TW" altLang="en-US"/>
               <a:t>按一下以編輯母片文字樣式</a:t>
             </a:r>
           </a:p>
           <a:p>
             <a:pPr lvl="1"/>
             <a:r>
-              <a:rPr lang="zh-TW" altLang="en-US" smtClean="0"/>
+              <a:rPr lang="zh-TW" altLang="en-US"/>
               <a:t>第二層</a:t>
             </a:r>
           </a:p>
           <a:p>
             <a:pPr lvl="2"/>
             <a:r>
-              <a:rPr lang="zh-TW" altLang="en-US" smtClean="0"/>
+              <a:rPr lang="zh-TW" altLang="en-US"/>
               <a:t>第三層</a:t>
             </a:r>
           </a:p>
           <a:p>
             <a:pPr lvl="3"/>
             <a:r>
-              <a:rPr lang="zh-TW" altLang="en-US" smtClean="0"/>
+              <a:rPr lang="zh-TW" altLang="en-US"/>
               <a:t>第四層</a:t>
             </a:r>
           </a:p>
           <a:p>
             <a:pPr lvl="4"/>
             <a:r>
-              <a:rPr lang="zh-TW" altLang="en-US" smtClean="0"/>
+              <a:rPr lang="zh-TW" altLang="en-US"/>
               <a:t>第五層</a:t>
             </a:r>
-            <a:endParaRPr lang="zh-TW" altLang="en-US"/>
           </a:p>
         </p:txBody>
       </p:sp>
@@ -2232,7 +2214,7 @@
           <a:p>
             <a:pPr lvl="0"/>
             <a:r>
-              <a:rPr lang="zh-TW" altLang="en-US" smtClean="0"/>
+              <a:rPr lang="zh-TW" altLang="en-US"/>
               <a:t>按一下以編輯母片文字樣式</a:t>
             </a:r>
           </a:p>
@@ -2256,7 +2238,7 @@
             <a:fld id="{C6AA4BA2-E9B8-4EFE-9EAE-9EAA4387E320}" type="datetimeFigureOut">
               <a:rPr lang="zh-TW" altLang="en-US" smtClean="0"/>
               <a:pPr/>
-              <a:t>2022/11/22</a:t>
+              <a:t>2024/11/9</a:t>
             </a:fld>
             <a:endParaRPr lang="zh-TW" altLang="en-US"/>
           </a:p>
@@ -2355,10 +2337,9 @@
           </a:lstStyle>
           <a:p>
             <a:r>
-              <a:rPr lang="zh-TW" altLang="en-US" smtClean="0"/>
+              <a:rPr lang="zh-TW" altLang="en-US"/>
               <a:t>按一下以編輯母片標題樣式</a:t>
             </a:r>
-            <a:endParaRPr lang="zh-TW" altLang="en-US"/>
           </a:p>
         </p:txBody>
       </p:sp>
@@ -2420,10 +2401,9 @@
           </a:lstStyle>
           <a:p>
             <a:r>
-              <a:rPr lang="zh-TW" altLang="en-US" smtClean="0"/>
+              <a:rPr lang="zh-TW" altLang="en-US"/>
               <a:t>按一下圖示以新增圖片</a:t>
             </a:r>
-            <a:endParaRPr lang="zh-TW" altLang="en-US"/>
           </a:p>
         </p:txBody>
       </p:sp>
@@ -2486,7 +2466,7 @@
           <a:p>
             <a:pPr lvl="0"/>
             <a:r>
-              <a:rPr lang="zh-TW" altLang="en-US" smtClean="0"/>
+              <a:rPr lang="zh-TW" altLang="en-US"/>
               <a:t>按一下以編輯母片文字樣式</a:t>
             </a:r>
           </a:p>
@@ -2510,7 +2490,7 @@
             <a:fld id="{C6AA4BA2-E9B8-4EFE-9EAE-9EAA4387E320}" type="datetimeFigureOut">
               <a:rPr lang="zh-TW" altLang="en-US" smtClean="0"/>
               <a:pPr/>
-              <a:t>2022/11/22</a:t>
+              <a:t>2024/11/9</a:t>
             </a:fld>
             <a:endParaRPr lang="zh-TW" altLang="en-US"/>
           </a:p>
@@ -2620,10 +2600,9 @@
           <a:lstStyle/>
           <a:p>
             <a:r>
-              <a:rPr lang="zh-TW" altLang="en-US" smtClean="0"/>
+              <a:rPr lang="zh-TW" altLang="en-US"/>
               <a:t>按一下以編輯母片標題樣式</a:t>
             </a:r>
-            <a:endParaRPr lang="zh-TW" altLang="en-US"/>
           </a:p>
         </p:txBody>
       </p:sp>
@@ -2654,38 +2633,37 @@
           <a:p>
             <a:pPr lvl="0"/>
             <a:r>
-              <a:rPr lang="zh-TW" altLang="en-US" smtClean="0"/>
+              <a:rPr lang="zh-TW" altLang="en-US"/>
               <a:t>按一下以編輯母片文字樣式</a:t>
             </a:r>
           </a:p>
           <a:p>
             <a:pPr lvl="1"/>
             <a:r>
-              <a:rPr lang="zh-TW" altLang="en-US" smtClean="0"/>
+              <a:rPr lang="zh-TW" altLang="en-US"/>
               <a:t>第二層</a:t>
             </a:r>
           </a:p>
           <a:p>
             <a:pPr lvl="2"/>
             <a:r>
-              <a:rPr lang="zh-TW" altLang="en-US" smtClean="0"/>
+              <a:rPr lang="zh-TW" altLang="en-US"/>
               <a:t>第三層</a:t>
             </a:r>
           </a:p>
           <a:p>
             <a:pPr lvl="3"/>
             <a:r>
-              <a:rPr lang="zh-TW" altLang="en-US" smtClean="0"/>
+              <a:rPr lang="zh-TW" altLang="en-US"/>
               <a:t>第四層</a:t>
             </a:r>
           </a:p>
           <a:p>
             <a:pPr lvl="4"/>
             <a:r>
-              <a:rPr lang="zh-TW" altLang="en-US" smtClean="0"/>
+              <a:rPr lang="zh-TW" altLang="en-US"/>
               <a:t>第五層</a:t>
             </a:r>
-            <a:endParaRPr lang="zh-TW" altLang="en-US"/>
           </a:p>
         </p:txBody>
       </p:sp>
@@ -2725,7 +2703,7 @@
             <a:fld id="{C6AA4BA2-E9B8-4EFE-9EAE-9EAA4387E320}" type="datetimeFigureOut">
               <a:rPr lang="zh-TW" altLang="en-US" smtClean="0"/>
               <a:pPr/>
-              <a:t>2022/11/22</a:t>
+              <a:t>2024/11/9</a:t>
             </a:fld>
             <a:endParaRPr lang="zh-TW" altLang="en-US"/>
           </a:p>
@@ -3152,23 +3130,6 @@
               </a:rPr>
               <a:t>108</a:t>
             </a:r>
-            <a:r>
-              <a:rPr lang="en-US" altLang="zh-CN" sz="7200" b="1" i="1" dirty="0">
-                <a:solidFill>
-                  <a:srgbClr val="660033"/>
-                </a:solidFill>
-                <a:effectLst>
-                  <a:outerShdw blurRad="38100" dist="38100" dir="2700000" algn="tl">
-                    <a:srgbClr val="000000">
-                      <a:alpha val="43137"/>
-                    </a:srgbClr>
-                  </a:outerShdw>
-                </a:effectLst>
-                <a:latin typeface="微軟正黑體" pitchFamily="34" charset="-120"/>
-                <a:ea typeface="微軟正黑體" pitchFamily="34" charset="-120"/>
-              </a:rPr>
-              <a:t/>
-            </a:r>
             <a:br>
               <a:rPr lang="en-US" altLang="zh-CN" sz="7200" b="1" i="1" dirty="0">
                 <a:solidFill>
@@ -3208,20 +3169,13 @@
     </p:spTree>
     <p:extLst>
       <p:ext uri="{BB962C8B-B14F-4D97-AF65-F5344CB8AC3E}">
-        <p14:creationId xmlns:p14="http://schemas.microsoft.com/office/powerpoint/2010/main" xmlns="" val="2948743791"/>
+        <p14:creationId xmlns:p14="http://schemas.microsoft.com/office/powerpoint/2010/main" val="2948743791"/>
       </p:ext>
     </p:extLst>
   </p:cSld>
   <p:clrMapOvr>
     <a:masterClrMapping/>
   </p:clrMapOvr>
-  <p:timing>
-    <p:tnLst>
-      <p:par>
-        <p:cTn id="1" dur="indefinite" restart="never" nodeType="tmRoot"/>
-      </p:par>
-    </p:tnLst>
-  </p:timing>
 </p:sld>
 </file>
 
@@ -3339,7 +3293,25 @@
                 </a:solidFill>
                 <a:effectLst/>
               </a:rPr>
-              <a:t>( x2 )</a:t>
+              <a:t>( 2</a:t>
+            </a:r>
+            <a:r>
+              <a:rPr lang="zh-CN" altLang="en-US" sz="4800" b="1" dirty="0">
+                <a:solidFill>
+                  <a:srgbClr val="000066"/>
+                </a:solidFill>
+                <a:effectLst/>
+              </a:rPr>
+              <a:t>次</a:t>
+            </a:r>
+            <a:r>
+              <a:rPr lang="en-US" sz="4800" b="1" dirty="0">
+                <a:solidFill>
+                  <a:srgbClr val="000066"/>
+                </a:solidFill>
+                <a:effectLst/>
+              </a:rPr>
+              <a:t> )</a:t>
             </a:r>
             <a:endParaRPr lang="vi-VN" sz="4800" b="1" dirty="0">
               <a:solidFill>
@@ -3353,20 +3325,13 @@
     </p:spTree>
     <p:extLst>
       <p:ext uri="{BB962C8B-B14F-4D97-AF65-F5344CB8AC3E}">
-        <p14:creationId xmlns:p14="http://schemas.microsoft.com/office/powerpoint/2010/main" xmlns="" val="664960521"/>
+        <p14:creationId xmlns:p14="http://schemas.microsoft.com/office/powerpoint/2010/main" val="664960521"/>
       </p:ext>
     </p:extLst>
   </p:cSld>
   <p:clrMapOvr>
     <a:masterClrMapping/>
   </p:clrMapOvr>
-  <p:timing>
-    <p:tnLst>
-      <p:par>
-        <p:cTn id="1" dur="indefinite" restart="never" nodeType="tmRoot"/>
-      </p:par>
-    </p:tnLst>
-  </p:timing>
 </p:sld>
 </file>
 
@@ -3483,23 +3448,7 @@
                   <a:srgbClr val="000066"/>
                 </a:solidFill>
               </a:rPr>
-              <a:t>( </a:t>
-            </a:r>
-            <a:r>
-              <a:rPr lang="en-US" sz="4800" b="1" dirty="0" smtClean="0">
-                <a:solidFill>
-                  <a:srgbClr val="000066"/>
-                </a:solidFill>
-              </a:rPr>
-              <a:t>4 </a:t>
-            </a:r>
-            <a:r>
-              <a:rPr lang="en-US" sz="4800" b="1" dirty="0">
-                <a:solidFill>
-                  <a:srgbClr val="000066"/>
-                </a:solidFill>
-              </a:rPr>
-              <a:t>/ 4 )</a:t>
+              <a:t>( 4 / 4 )</a:t>
             </a:r>
             <a:endParaRPr lang="vi-VN" sz="4800" b="1" dirty="0">
               <a:solidFill>
@@ -3512,20 +3461,13 @@
     </p:spTree>
     <p:extLst>
       <p:ext uri="{BB962C8B-B14F-4D97-AF65-F5344CB8AC3E}">
-        <p14:creationId xmlns:p14="http://schemas.microsoft.com/office/powerpoint/2010/main" xmlns="" val="3209160743"/>
+        <p14:creationId xmlns:p14="http://schemas.microsoft.com/office/powerpoint/2010/main" val="3209160743"/>
       </p:ext>
     </p:extLst>
   </p:cSld>
   <p:clrMapOvr>
     <a:masterClrMapping/>
   </p:clrMapOvr>
-  <p:timing>
-    <p:tnLst>
-      <p:par>
-        <p:cTn id="1" dur="indefinite" restart="never" nodeType="tmRoot"/>
-      </p:par>
-    </p:tnLst>
-  </p:timing>
 </p:sld>
 </file>
 
@@ -3648,20 +3590,13 @@
     </p:spTree>
     <p:extLst>
       <p:ext uri="{BB962C8B-B14F-4D97-AF65-F5344CB8AC3E}">
-        <p14:creationId xmlns:p14="http://schemas.microsoft.com/office/powerpoint/2010/main" xmlns="" val="92835997"/>
+        <p14:creationId xmlns:p14="http://schemas.microsoft.com/office/powerpoint/2010/main" val="92835997"/>
       </p:ext>
     </p:extLst>
   </p:cSld>
   <p:clrMapOvr>
     <a:masterClrMapping/>
   </p:clrMapOvr>
-  <p:timing>
-    <p:tnLst>
-      <p:par>
-        <p:cTn id="1" dur="indefinite" restart="never" nodeType="tmRoot"/>
-      </p:par>
-    </p:tnLst>
-  </p:timing>
 </p:sld>
 </file>
 
@@ -3779,7 +3714,25 @@
                 </a:solidFill>
                 <a:effectLst/>
               </a:rPr>
-              <a:t>( x2 )</a:t>
+              <a:t>( 2</a:t>
+            </a:r>
+            <a:r>
+              <a:rPr lang="zh-CN" altLang="en-US" sz="4800" b="1" dirty="0">
+                <a:solidFill>
+                  <a:srgbClr val="000066"/>
+                </a:solidFill>
+                <a:effectLst/>
+              </a:rPr>
+              <a:t>次</a:t>
+            </a:r>
+            <a:r>
+              <a:rPr lang="en-US" sz="4800" b="1">
+                <a:solidFill>
+                  <a:srgbClr val="000066"/>
+                </a:solidFill>
+                <a:effectLst/>
+              </a:rPr>
+              <a:t> )</a:t>
             </a:r>
             <a:endParaRPr lang="vi-VN" sz="4800" b="1" dirty="0">
               <a:solidFill>
@@ -3793,20 +3746,13 @@
     </p:spTree>
     <p:extLst>
       <p:ext uri="{BB962C8B-B14F-4D97-AF65-F5344CB8AC3E}">
-        <p14:creationId xmlns:p14="http://schemas.microsoft.com/office/powerpoint/2010/main" xmlns="" val="3278338163"/>
+        <p14:creationId xmlns:p14="http://schemas.microsoft.com/office/powerpoint/2010/main" val="3278338163"/>
       </p:ext>
     </p:extLst>
   </p:cSld>
   <p:clrMapOvr>
     <a:masterClrMapping/>
   </p:clrMapOvr>
-  <p:timing>
-    <p:tnLst>
-      <p:par>
-        <p:cTn id="1" dur="indefinite" restart="never" nodeType="tmRoot"/>
-      </p:par>
-    </p:tnLst>
-  </p:timing>
 </p:sld>
 </file>
 
@@ -3924,16 +3870,7 @@
                 </a:solidFill>
                 <a:effectLst/>
               </a:rPr>
-              <a:t>( 1 </a:t>
-            </a:r>
-            <a:r>
-              <a:rPr lang="en-US" sz="4800" b="1" dirty="0" smtClean="0">
-                <a:solidFill>
-                  <a:srgbClr val="000066"/>
-                </a:solidFill>
-                <a:effectLst/>
-              </a:rPr>
-              <a:t>/ 4 )</a:t>
+              <a:t>( 1 / 4 )</a:t>
             </a:r>
             <a:endParaRPr lang="vi-VN" sz="4800" b="1" dirty="0">
               <a:solidFill>
@@ -3947,20 +3884,13 @@
     </p:spTree>
     <p:extLst>
       <p:ext uri="{BB962C8B-B14F-4D97-AF65-F5344CB8AC3E}">
-        <p14:creationId xmlns:p14="http://schemas.microsoft.com/office/powerpoint/2010/main" xmlns="" val="1652222198"/>
+        <p14:creationId xmlns:p14="http://schemas.microsoft.com/office/powerpoint/2010/main" val="1652222198"/>
       </p:ext>
     </p:extLst>
   </p:cSld>
   <p:clrMapOvr>
     <a:masterClrMapping/>
   </p:clrMapOvr>
-  <p:timing>
-    <p:tnLst>
-      <p:par>
-        <p:cTn id="1" dur="indefinite" restart="never" nodeType="tmRoot"/>
-      </p:par>
-    </p:tnLst>
-  </p:timing>
 </p:sld>
 </file>
 
@@ -4083,20 +4013,13 @@
     </p:spTree>
     <p:extLst>
       <p:ext uri="{BB962C8B-B14F-4D97-AF65-F5344CB8AC3E}">
-        <p14:creationId xmlns:p14="http://schemas.microsoft.com/office/powerpoint/2010/main" xmlns="" val="282867053"/>
+        <p14:creationId xmlns:p14="http://schemas.microsoft.com/office/powerpoint/2010/main" val="282867053"/>
       </p:ext>
     </p:extLst>
   </p:cSld>
   <p:clrMapOvr>
     <a:masterClrMapping/>
   </p:clrMapOvr>
-  <p:timing>
-    <p:tnLst>
-      <p:par>
-        <p:cTn id="1" dur="indefinite" restart="never" nodeType="tmRoot"/>
-      </p:par>
-    </p:tnLst>
-  </p:timing>
 </p:sld>
 </file>
 
@@ -4214,7 +4137,25 @@
                 </a:solidFill>
                 <a:effectLst/>
               </a:rPr>
-              <a:t>( x2 )</a:t>
+              <a:t>( 2</a:t>
+            </a:r>
+            <a:r>
+              <a:rPr lang="zh-CN" altLang="en-US" sz="4800" b="1" dirty="0">
+                <a:solidFill>
+                  <a:srgbClr val="000066"/>
+                </a:solidFill>
+                <a:effectLst/>
+              </a:rPr>
+              <a:t>次</a:t>
+            </a:r>
+            <a:r>
+              <a:rPr lang="en-US" sz="4800" b="1" dirty="0">
+                <a:solidFill>
+                  <a:srgbClr val="000066"/>
+                </a:solidFill>
+                <a:effectLst/>
+              </a:rPr>
+              <a:t> )</a:t>
             </a:r>
             <a:endParaRPr lang="vi-VN" sz="4800" b="1" dirty="0">
               <a:solidFill>
@@ -4228,20 +4169,13 @@
     </p:spTree>
     <p:extLst>
       <p:ext uri="{BB962C8B-B14F-4D97-AF65-F5344CB8AC3E}">
-        <p14:creationId xmlns:p14="http://schemas.microsoft.com/office/powerpoint/2010/main" xmlns="" val="749072301"/>
+        <p14:creationId xmlns:p14="http://schemas.microsoft.com/office/powerpoint/2010/main" val="749072301"/>
       </p:ext>
     </p:extLst>
   </p:cSld>
   <p:clrMapOvr>
     <a:masterClrMapping/>
   </p:clrMapOvr>
-  <p:timing>
-    <p:tnLst>
-      <p:par>
-        <p:cTn id="1" dur="indefinite" restart="never" nodeType="tmRoot"/>
-      </p:par>
-    </p:tnLst>
-  </p:timing>
 </p:sld>
 </file>
 
@@ -4358,23 +4292,7 @@
                   <a:srgbClr val="000066"/>
                 </a:solidFill>
               </a:rPr>
-              <a:t>( </a:t>
-            </a:r>
-            <a:r>
-              <a:rPr lang="en-US" sz="4800" b="1" dirty="0" smtClean="0">
-                <a:solidFill>
-                  <a:srgbClr val="000066"/>
-                </a:solidFill>
-              </a:rPr>
-              <a:t>2 </a:t>
-            </a:r>
-            <a:r>
-              <a:rPr lang="en-US" sz="4800" b="1" dirty="0">
-                <a:solidFill>
-                  <a:srgbClr val="000066"/>
-                </a:solidFill>
-              </a:rPr>
-              <a:t>/ 4 )</a:t>
+              <a:t>( 2 / 4 )</a:t>
             </a:r>
             <a:endParaRPr lang="vi-VN" sz="4800" b="1" dirty="0">
               <a:solidFill>
@@ -4387,20 +4305,13 @@
     </p:spTree>
     <p:extLst>
       <p:ext uri="{BB962C8B-B14F-4D97-AF65-F5344CB8AC3E}">
-        <p14:creationId xmlns:p14="http://schemas.microsoft.com/office/powerpoint/2010/main" xmlns="" val="1490601079"/>
+        <p14:creationId xmlns:p14="http://schemas.microsoft.com/office/powerpoint/2010/main" val="1490601079"/>
       </p:ext>
     </p:extLst>
   </p:cSld>
   <p:clrMapOvr>
     <a:masterClrMapping/>
   </p:clrMapOvr>
-  <p:timing>
-    <p:tnLst>
-      <p:par>
-        <p:cTn id="1" dur="indefinite" restart="never" nodeType="tmRoot"/>
-      </p:par>
-    </p:tnLst>
-  </p:timing>
 </p:sld>
 </file>
 
@@ -4523,20 +4434,13 @@
     </p:spTree>
     <p:extLst>
       <p:ext uri="{BB962C8B-B14F-4D97-AF65-F5344CB8AC3E}">
-        <p14:creationId xmlns:p14="http://schemas.microsoft.com/office/powerpoint/2010/main" xmlns="" val="3254057356"/>
+        <p14:creationId xmlns:p14="http://schemas.microsoft.com/office/powerpoint/2010/main" val="3254057356"/>
       </p:ext>
     </p:extLst>
   </p:cSld>
   <p:clrMapOvr>
     <a:masterClrMapping/>
   </p:clrMapOvr>
-  <p:timing>
-    <p:tnLst>
-      <p:par>
-        <p:cTn id="1" dur="indefinite" restart="never" nodeType="tmRoot"/>
-      </p:par>
-    </p:tnLst>
-  </p:timing>
 </p:sld>
 </file>
 
@@ -4654,7 +4558,25 @@
                 </a:solidFill>
                 <a:effectLst/>
               </a:rPr>
-              <a:t>( x2 )</a:t>
+              <a:t>( 2</a:t>
+            </a:r>
+            <a:r>
+              <a:rPr lang="zh-CN" altLang="en-US" sz="4800" b="1" dirty="0">
+                <a:solidFill>
+                  <a:srgbClr val="000066"/>
+                </a:solidFill>
+                <a:effectLst/>
+              </a:rPr>
+              <a:t>次</a:t>
+            </a:r>
+            <a:r>
+              <a:rPr lang="en-US" sz="4800" b="1" dirty="0">
+                <a:solidFill>
+                  <a:srgbClr val="000066"/>
+                </a:solidFill>
+                <a:effectLst/>
+              </a:rPr>
+              <a:t> )</a:t>
             </a:r>
             <a:endParaRPr lang="vi-VN" sz="4800" b="1" dirty="0">
               <a:solidFill>
@@ -4668,20 +4590,13 @@
     </p:spTree>
     <p:extLst>
       <p:ext uri="{BB962C8B-B14F-4D97-AF65-F5344CB8AC3E}">
-        <p14:creationId xmlns:p14="http://schemas.microsoft.com/office/powerpoint/2010/main" xmlns="" val="2592621456"/>
+        <p14:creationId xmlns:p14="http://schemas.microsoft.com/office/powerpoint/2010/main" val="2592621456"/>
       </p:ext>
     </p:extLst>
   </p:cSld>
   <p:clrMapOvr>
     <a:masterClrMapping/>
   </p:clrMapOvr>
-  <p:timing>
-    <p:tnLst>
-      <p:par>
-        <p:cTn id="1" dur="indefinite" restart="never" nodeType="tmRoot"/>
-      </p:par>
-    </p:tnLst>
-  </p:timing>
 </p:sld>
 </file>
 
@@ -4798,23 +4713,7 @@
                   <a:srgbClr val="000066"/>
                 </a:solidFill>
               </a:rPr>
-              <a:t>( </a:t>
-            </a:r>
-            <a:r>
-              <a:rPr lang="en-US" sz="4800" b="1" dirty="0" smtClean="0">
-                <a:solidFill>
-                  <a:srgbClr val="000066"/>
-                </a:solidFill>
-              </a:rPr>
-              <a:t>3 </a:t>
-            </a:r>
-            <a:r>
-              <a:rPr lang="en-US" sz="4800" b="1" dirty="0">
-                <a:solidFill>
-                  <a:srgbClr val="000066"/>
-                </a:solidFill>
-              </a:rPr>
-              <a:t>/ 4 )</a:t>
+              <a:t>( 3 / 4 )</a:t>
             </a:r>
             <a:endParaRPr lang="vi-VN" sz="4800" b="1" dirty="0">
               <a:solidFill>
@@ -4827,20 +4726,13 @@
     </p:spTree>
     <p:extLst>
       <p:ext uri="{BB962C8B-B14F-4D97-AF65-F5344CB8AC3E}">
-        <p14:creationId xmlns:p14="http://schemas.microsoft.com/office/powerpoint/2010/main" xmlns="" val="2015581171"/>
+        <p14:creationId xmlns:p14="http://schemas.microsoft.com/office/powerpoint/2010/main" val="2015581171"/>
       </p:ext>
     </p:extLst>
   </p:cSld>
   <p:clrMapOvr>
     <a:masterClrMapping/>
   </p:clrMapOvr>
-  <p:timing>
-    <p:tnLst>
-      <p:par>
-        <p:cTn id="1" dur="indefinite" restart="never" nodeType="tmRoot"/>
-      </p:par>
-    </p:tnLst>
-  </p:timing>
 </p:sld>
 </file>
 
@@ -4963,20 +4855,13 @@
     </p:spTree>
     <p:extLst>
       <p:ext uri="{BB962C8B-B14F-4D97-AF65-F5344CB8AC3E}">
-        <p14:creationId xmlns:p14="http://schemas.microsoft.com/office/powerpoint/2010/main" xmlns="" val="519739348"/>
+        <p14:creationId xmlns:p14="http://schemas.microsoft.com/office/powerpoint/2010/main" val="519739348"/>
       </p:ext>
     </p:extLst>
   </p:cSld>
   <p:clrMapOvr>
     <a:masterClrMapping/>
   </p:clrMapOvr>
-  <p:timing>
-    <p:tnLst>
-      <p:par>
-        <p:cTn id="1" dur="indefinite" restart="never" nodeType="tmRoot"/>
-      </p:par>
-    </p:tnLst>
-  </p:timing>
 </p:sld>
 </file>
 
